--- a/PPT PROJECT GLPI.pptx
+++ b/PPT PROJECT GLPI.pptx
@@ -5285,7 +5285,7 @@
                 </a:solidFill>
                 <a:latin typeface="Inter Medium"/>
               </a:rPr>
-              <a:t>Penanganan tiket otomatis, SLA tracking, &amp; inventaris aset terintegrasi</a:t>
+              <a:t>Penanganan permintaan otomatis, SLA tracking, &amp; inventaris aset terintegrasi</a:t>
             </a:r>
             <a:endParaRPr sz="1012" b="0" i="0" u="none" dirty="0">
               <a:solidFill>
